--- a/media/resources/files/4-Amal-MisalKorsot_11hdQg8.pptx
+++ b/media/resources/files/4-Amal-MisalKorsot_11hdQg8.pptx
@@ -5148,7 +5148,7 @@
             </a:pPr>
             <a:r>
               <a:rPr lang="ru-RU" sz="3200" dirty="0"/>
-              <a:t>Турдуу пикирлер учун ыраазычылык билдиребиз.</a:t>
+              <a:t>Түрдүү пикирлер үчүн ыраазычылык билдиребиз.</a:t>
             </a:r>
           </a:p>
           <a:p>

--- a/media/resources/files/4-Amal-MisalKorsot_11hdQg8.pptx
+++ b/media/resources/files/4-Amal-MisalKorsot_11hdQg8.pptx
@@ -1045,7 +1045,7 @@
             </a:pPr>
             <a:r>
               <a:rPr lang="ru-RU" sz="2400" dirty="0"/>
-              <a:t>Студенттер өз жоопторун эки - экиден же мугалимге  көрсөтүп текшере алышы керек.</a:t>
+              <a:t>Окуучулар жообун жупташып же мугалимге көрсөтүп текшерет.</a:t>
             </a:r>
           </a:p>
           <a:p>
@@ -1062,7 +1062,7 @@
             </a:pPr>
             <a:r>
               <a:rPr lang="ru-RU" sz="2400" dirty="0"/>
-              <a:t>Студенттер мини-тактада же дептер аркылуу жооп бере алышат</a:t>
+              <a:t>Окуучулар мини-тактага же дептерге жооп жаза алышат</a:t>
             </a:r>
           </a:p>
           <a:p>
